--- a/OnliSharpTeam IDE.pptx
+++ b/OnliSharpTeam IDE.pptx
@@ -12,6 +12,9 @@
     <p:sldId id="260" r:id="rId6"/>
     <p:sldId id="261" r:id="rId7"/>
     <p:sldId id="262" r:id="rId8"/>
+    <p:sldId id="263" r:id="rId9"/>
+    <p:sldId id="264" r:id="rId10"/>
+    <p:sldId id="265" r:id="rId11"/>
   </p:sldIdLst>
   <p:sldSz cx="12192000" cy="6858000"/>
   <p:notesSz cx="6858000" cy="9144000"/>
@@ -110,6 +113,11 @@
       </a:defRPr>
     </a:lvl9pPr>
   </p:defaultTextStyle>
+  <p:extLst>
+    <p:ext uri="{EFAFB233-063F-42B5-8137-9DF3F51BA10A}">
+      <p15:sldGuideLst xmlns:p15="http://schemas.microsoft.com/office/powerpoint/2012/main"/>
+    </p:ext>
+  </p:extLst>
 </p:presentation>
 </file>
 
@@ -4143,6 +4151,116 @@
 </p:sld>
 </file>
 
+<file path=ppt/slides/slide10.xml><?xml version="1.0" encoding="utf-8"?>
+<p:sld xmlns:a="http://schemas.openxmlformats.org/drawingml/2006/main" xmlns:r="http://schemas.openxmlformats.org/officeDocument/2006/relationships" xmlns:p="http://schemas.openxmlformats.org/presentationml/2006/main">
+  <p:cSld>
+    <p:spTree>
+      <p:nvGrpSpPr>
+        <p:cNvPr id="1" name=""/>
+        <p:cNvGrpSpPr/>
+        <p:nvPr/>
+      </p:nvGrpSpPr>
+      <p:grpSpPr>
+        <a:xfrm>
+          <a:off x="0" y="0"/>
+          <a:ext cx="0" cy="0"/>
+          <a:chOff x="0" y="0"/>
+          <a:chExt cx="0" cy="0"/>
+        </a:xfrm>
+      </p:grpSpPr>
+      <p:sp>
+        <p:nvSpPr>
+          <p:cNvPr id="2" name="Заголовок 1">
+            <a:extLst>
+              <a:ext uri="{FF2B5EF4-FFF2-40B4-BE49-F238E27FC236}">
+                <a16:creationId xmlns:a16="http://schemas.microsoft.com/office/drawing/2014/main" id="{02699B9C-0D1F-FEF8-9A53-51109637133D}"/>
+              </a:ext>
+            </a:extLst>
+          </p:cNvPr>
+          <p:cNvSpPr>
+            <a:spLocks noGrp="1"/>
+          </p:cNvSpPr>
+          <p:nvPr>
+            <p:ph type="title"/>
+          </p:nvPr>
+        </p:nvSpPr>
+        <p:spPr/>
+        <p:txBody>
+          <a:bodyPr/>
+          <a:lstStyle/>
+          <a:p>
+            <a:endParaRPr lang="ru-RU"/>
+          </a:p>
+        </p:txBody>
+      </p:sp>
+      <p:sp>
+        <p:nvSpPr>
+          <p:cNvPr id="3" name="Объект 2">
+            <a:extLst>
+              <a:ext uri="{FF2B5EF4-FFF2-40B4-BE49-F238E27FC236}">
+                <a16:creationId xmlns:a16="http://schemas.microsoft.com/office/drawing/2014/main" id="{F8C07198-553C-5363-880D-C8F84946CCA0}"/>
+              </a:ext>
+            </a:extLst>
+          </p:cNvPr>
+          <p:cNvSpPr>
+            <a:spLocks noGrp="1"/>
+          </p:cNvSpPr>
+          <p:nvPr>
+            <p:ph idx="1"/>
+          </p:nvPr>
+        </p:nvSpPr>
+        <p:spPr/>
+        <p:txBody>
+          <a:bodyPr/>
+          <a:lstStyle/>
+          <a:p>
+            <a:endParaRPr lang="ru-RU"/>
+          </a:p>
+        </p:txBody>
+      </p:sp>
+      <p:pic>
+        <p:nvPicPr>
+          <p:cNvPr id="5" name="Рисунок 4">
+            <a:extLst>
+              <a:ext uri="{FF2B5EF4-FFF2-40B4-BE49-F238E27FC236}">
+                <a16:creationId xmlns:a16="http://schemas.microsoft.com/office/drawing/2014/main" id="{DC4DD67B-8C9E-65ED-C9CC-83A78CBA1A59}"/>
+              </a:ext>
+            </a:extLst>
+          </p:cNvPr>
+          <p:cNvPicPr>
+            <a:picLocks noChangeAspect="1"/>
+          </p:cNvPicPr>
+          <p:nvPr/>
+        </p:nvPicPr>
+        <p:blipFill>
+          <a:blip r:embed="rId2"/>
+          <a:stretch>
+            <a:fillRect/>
+          </a:stretch>
+        </p:blipFill>
+        <p:spPr>
+          <a:xfrm>
+            <a:off x="982639" y="510627"/>
+            <a:ext cx="10972800" cy="3322145"/>
+          </a:xfrm>
+          <a:prstGeom prst="rect">
+            <a:avLst/>
+          </a:prstGeom>
+        </p:spPr>
+      </p:pic>
+    </p:spTree>
+    <p:extLst>
+      <p:ext uri="{BB962C8B-B14F-4D97-AF65-F5344CB8AC3E}">
+        <p14:creationId xmlns:p14="http://schemas.microsoft.com/office/powerpoint/2010/main" val="3223640647"/>
+      </p:ext>
+    </p:extLst>
+  </p:cSld>
+  <p:clrMapOvr>
+    <a:masterClrMapping/>
+  </p:clrMapOvr>
+</p:sld>
+</file>
+
 <file path=ppt/slides/slide2.xml><?xml version="1.0" encoding="utf-8"?>
 <p:sld xmlns:a="http://schemas.openxmlformats.org/drawingml/2006/main" xmlns:r="http://schemas.openxmlformats.org/officeDocument/2006/relationships" xmlns:p="http://schemas.openxmlformats.org/presentationml/2006/main">
   <p:cSld>
@@ -5769,6 +5887,233 @@
     <p:extLst>
       <p:ext uri="{BB962C8B-B14F-4D97-AF65-F5344CB8AC3E}">
         <p14:creationId xmlns:p14="http://schemas.microsoft.com/office/powerpoint/2010/main" val="1563934499"/>
+      </p:ext>
+    </p:extLst>
+  </p:cSld>
+  <p:clrMapOvr>
+    <a:masterClrMapping/>
+  </p:clrMapOvr>
+</p:sld>
+</file>
+
+<file path=ppt/slides/slide8.xml><?xml version="1.0" encoding="utf-8"?>
+<p:sld xmlns:a="http://schemas.openxmlformats.org/drawingml/2006/main" xmlns:r="http://schemas.openxmlformats.org/officeDocument/2006/relationships" xmlns:p="http://schemas.openxmlformats.org/presentationml/2006/main">
+  <p:cSld>
+    <p:spTree>
+      <p:nvGrpSpPr>
+        <p:cNvPr id="1" name=""/>
+        <p:cNvGrpSpPr/>
+        <p:nvPr/>
+      </p:nvGrpSpPr>
+      <p:grpSpPr>
+        <a:xfrm>
+          <a:off x="0" y="0"/>
+          <a:ext cx="0" cy="0"/>
+          <a:chOff x="0" y="0"/>
+          <a:chExt cx="0" cy="0"/>
+        </a:xfrm>
+      </p:grpSpPr>
+      <p:sp>
+        <p:nvSpPr>
+          <p:cNvPr id="2" name="Заголовок 1">
+            <a:extLst>
+              <a:ext uri="{FF2B5EF4-FFF2-40B4-BE49-F238E27FC236}">
+                <a16:creationId xmlns:a16="http://schemas.microsoft.com/office/drawing/2014/main" id="{6CD9BFA9-FFCB-026E-B86E-1925EFAFF7F6}"/>
+              </a:ext>
+            </a:extLst>
+          </p:cNvPr>
+          <p:cNvSpPr>
+            <a:spLocks noGrp="1"/>
+          </p:cNvSpPr>
+          <p:nvPr>
+            <p:ph type="title"/>
+          </p:nvPr>
+        </p:nvSpPr>
+        <p:spPr/>
+        <p:txBody>
+          <a:bodyPr/>
+          <a:lstStyle/>
+          <a:p>
+            <a:endParaRPr lang="ru-RU"/>
+          </a:p>
+        </p:txBody>
+      </p:sp>
+      <p:pic>
+        <p:nvPicPr>
+          <p:cNvPr id="7" name="Объект 6">
+            <a:extLst>
+              <a:ext uri="{FF2B5EF4-FFF2-40B4-BE49-F238E27FC236}">
+                <a16:creationId xmlns:a16="http://schemas.microsoft.com/office/drawing/2014/main" id="{C7AAAEFD-F8C7-3419-EA36-983AB791D6A6}"/>
+              </a:ext>
+            </a:extLst>
+          </p:cNvPr>
+          <p:cNvPicPr>
+            <a:picLocks noGrp="1" noChangeAspect="1"/>
+          </p:cNvPicPr>
+          <p:nvPr>
+            <p:ph idx="1"/>
+          </p:nvPr>
+        </p:nvPicPr>
+        <p:blipFill>
+          <a:blip r:embed="rId2"/>
+          <a:stretch>
+            <a:fillRect/>
+          </a:stretch>
+        </p:blipFill>
+        <p:spPr>
+          <a:xfrm>
+            <a:off x="6332880" y="829828"/>
+            <a:ext cx="5427913" cy="4972743"/>
+          </a:xfrm>
+          <a:prstGeom prst="rect">
+            <a:avLst/>
+          </a:prstGeom>
+        </p:spPr>
+      </p:pic>
+      <p:pic>
+        <p:nvPicPr>
+          <p:cNvPr id="5" name="Рисунок 4">
+            <a:extLst>
+              <a:ext uri="{FF2B5EF4-FFF2-40B4-BE49-F238E27FC236}">
+                <a16:creationId xmlns:a16="http://schemas.microsoft.com/office/drawing/2014/main" id="{CB6D3335-75AF-5EC5-DD88-164146F3D76D}"/>
+              </a:ext>
+            </a:extLst>
+          </p:cNvPr>
+          <p:cNvPicPr>
+            <a:picLocks noChangeAspect="1"/>
+          </p:cNvPicPr>
+          <p:nvPr/>
+        </p:nvPicPr>
+        <p:blipFill>
+          <a:blip r:embed="rId3"/>
+          <a:stretch>
+            <a:fillRect/>
+          </a:stretch>
+        </p:blipFill>
+        <p:spPr>
+          <a:xfrm>
+            <a:off x="839337" y="829829"/>
+            <a:ext cx="5372850" cy="4972744"/>
+          </a:xfrm>
+          <a:prstGeom prst="rect">
+            <a:avLst/>
+          </a:prstGeom>
+        </p:spPr>
+      </p:pic>
+    </p:spTree>
+    <p:extLst>
+      <p:ext uri="{BB962C8B-B14F-4D97-AF65-F5344CB8AC3E}">
+        <p14:creationId xmlns:p14="http://schemas.microsoft.com/office/powerpoint/2010/main" val="1085963759"/>
+      </p:ext>
+    </p:extLst>
+  </p:cSld>
+  <p:clrMapOvr>
+    <a:masterClrMapping/>
+  </p:clrMapOvr>
+</p:sld>
+</file>
+
+<file path=ppt/slides/slide9.xml><?xml version="1.0" encoding="utf-8"?>
+<p:sld xmlns:a="http://schemas.openxmlformats.org/drawingml/2006/main" xmlns:r="http://schemas.openxmlformats.org/officeDocument/2006/relationships" xmlns:p="http://schemas.openxmlformats.org/presentationml/2006/main">
+  <p:cSld>
+    <p:spTree>
+      <p:nvGrpSpPr>
+        <p:cNvPr id="1" name=""/>
+        <p:cNvGrpSpPr/>
+        <p:nvPr/>
+      </p:nvGrpSpPr>
+      <p:grpSpPr>
+        <a:xfrm>
+          <a:off x="0" y="0"/>
+          <a:ext cx="0" cy="0"/>
+          <a:chOff x="0" y="0"/>
+          <a:chExt cx="0" cy="0"/>
+        </a:xfrm>
+      </p:grpSpPr>
+      <p:sp>
+        <p:nvSpPr>
+          <p:cNvPr id="2" name="Заголовок 1">
+            <a:extLst>
+              <a:ext uri="{FF2B5EF4-FFF2-40B4-BE49-F238E27FC236}">
+                <a16:creationId xmlns:a16="http://schemas.microsoft.com/office/drawing/2014/main" id="{50221907-74DE-E88F-65AE-EA924E9E3254}"/>
+              </a:ext>
+            </a:extLst>
+          </p:cNvPr>
+          <p:cNvSpPr>
+            <a:spLocks noGrp="1"/>
+          </p:cNvSpPr>
+          <p:nvPr>
+            <p:ph type="title"/>
+          </p:nvPr>
+        </p:nvSpPr>
+        <p:spPr/>
+        <p:txBody>
+          <a:bodyPr/>
+          <a:lstStyle/>
+          <a:p>
+            <a:endParaRPr lang="ru-RU"/>
+          </a:p>
+        </p:txBody>
+      </p:sp>
+      <p:sp>
+        <p:nvSpPr>
+          <p:cNvPr id="3" name="Объект 2">
+            <a:extLst>
+              <a:ext uri="{FF2B5EF4-FFF2-40B4-BE49-F238E27FC236}">
+                <a16:creationId xmlns:a16="http://schemas.microsoft.com/office/drawing/2014/main" id="{30DE307D-9E31-7AED-8336-6EF6484B7F39}"/>
+              </a:ext>
+            </a:extLst>
+          </p:cNvPr>
+          <p:cNvSpPr>
+            <a:spLocks noGrp="1"/>
+          </p:cNvSpPr>
+          <p:nvPr>
+            <p:ph idx="1"/>
+          </p:nvPr>
+        </p:nvSpPr>
+        <p:spPr/>
+        <p:txBody>
+          <a:bodyPr/>
+          <a:lstStyle/>
+          <a:p>
+            <a:endParaRPr lang="ru-RU"/>
+          </a:p>
+        </p:txBody>
+      </p:sp>
+      <p:pic>
+        <p:nvPicPr>
+          <p:cNvPr id="5" name="Рисунок 4">
+            <a:extLst>
+              <a:ext uri="{FF2B5EF4-FFF2-40B4-BE49-F238E27FC236}">
+                <a16:creationId xmlns:a16="http://schemas.microsoft.com/office/drawing/2014/main" id="{34126C0C-1DD0-19D7-CBCC-C0C9D362A85A}"/>
+              </a:ext>
+            </a:extLst>
+          </p:cNvPr>
+          <p:cNvPicPr>
+            <a:picLocks noChangeAspect="1"/>
+          </p:cNvPicPr>
+          <p:nvPr/>
+        </p:nvPicPr>
+        <p:blipFill>
+          <a:blip r:embed="rId2"/>
+          <a:stretch>
+            <a:fillRect/>
+          </a:stretch>
+        </p:blipFill>
+        <p:spPr>
+          <a:xfrm>
+            <a:off x="996286" y="1740131"/>
+            <a:ext cx="10686197" cy="3614040"/>
+          </a:xfrm>
+          <a:prstGeom prst="rect">
+            <a:avLst/>
+          </a:prstGeom>
+        </p:spPr>
+      </p:pic>
+    </p:spTree>
+    <p:extLst>
+      <p:ext uri="{BB962C8B-B14F-4D97-AF65-F5344CB8AC3E}">
+        <p14:creationId xmlns:p14="http://schemas.microsoft.com/office/powerpoint/2010/main" val="3589552241"/>
       </p:ext>
     </p:extLst>
   </p:cSld>

--- a/OnliSharpTeam IDE.pptx
+++ b/OnliSharpTeam IDE.pptx
@@ -4220,10 +4220,10 @@
       </p:sp>
       <p:pic>
         <p:nvPicPr>
-          <p:cNvPr id="5" name="Рисунок 4">
+          <p:cNvPr id="6" name="Рисунок 5">
             <a:extLst>
               <a:ext uri="{FF2B5EF4-FFF2-40B4-BE49-F238E27FC236}">
-                <a16:creationId xmlns:a16="http://schemas.microsoft.com/office/drawing/2014/main" id="{DC4DD67B-8C9E-65ED-C9CC-83A78CBA1A59}"/>
+                <a16:creationId xmlns:a16="http://schemas.microsoft.com/office/drawing/2014/main" id="{07291E5E-8C29-E66C-6BFF-1B857FC73248}"/>
               </a:ext>
             </a:extLst>
           </p:cNvPr>
@@ -4240,8 +4240,8 @@
         </p:blipFill>
         <p:spPr>
           <a:xfrm>
-            <a:off x="982639" y="510627"/>
-            <a:ext cx="10972800" cy="3322145"/>
+            <a:off x="977153" y="941044"/>
+            <a:ext cx="10668000" cy="5231156"/>
           </a:xfrm>
           <a:prstGeom prst="rect">
             <a:avLst/>
